--- a/Schedule.pptx
+++ b/Schedule.pptx
@@ -104,6 +104,11 @@
       </a:defRPr>
     </a:lvl9pPr>
   </p:defaultTextStyle>
+  <p:extLst>
+    <p:ext uri="{EFAFB233-063F-42B5-8137-9DF3F51BA10A}">
+      <p15:sldGuideLst xmlns:p15="http://schemas.microsoft.com/office/powerpoint/2012/main"/>
+    </p:ext>
+  </p:extLst>
 </p:presentation>
 </file>
 
@@ -254,7 +259,7 @@
           <a:p>
             <a:fld id="{3BF34D9E-550C-6C44-8CC8-074FD14C08B4}" type="datetimeFigureOut">
               <a:rPr lang="en-US" smtClean="0"/>
-              <a:t>7/5/26</a:t>
+              <a:t>7/6/26</a:t>
             </a:fld>
             <a:endParaRPr lang="en-US"/>
           </a:p>
@@ -452,7 +457,7 @@
           <a:p>
             <a:fld id="{3BF34D9E-550C-6C44-8CC8-074FD14C08B4}" type="datetimeFigureOut">
               <a:rPr lang="en-US" smtClean="0"/>
-              <a:t>7/5/26</a:t>
+              <a:t>7/6/26</a:t>
             </a:fld>
             <a:endParaRPr lang="en-US"/>
           </a:p>
@@ -660,7 +665,7 @@
           <a:p>
             <a:fld id="{3BF34D9E-550C-6C44-8CC8-074FD14C08B4}" type="datetimeFigureOut">
               <a:rPr lang="en-US" smtClean="0"/>
-              <a:t>7/5/26</a:t>
+              <a:t>7/6/26</a:t>
             </a:fld>
             <a:endParaRPr lang="en-US"/>
           </a:p>
@@ -858,7 +863,7 @@
           <a:p>
             <a:fld id="{3BF34D9E-550C-6C44-8CC8-074FD14C08B4}" type="datetimeFigureOut">
               <a:rPr lang="en-US" smtClean="0"/>
-              <a:t>7/5/26</a:t>
+              <a:t>7/6/26</a:t>
             </a:fld>
             <a:endParaRPr lang="en-US"/>
           </a:p>
@@ -1133,7 +1138,7 @@
           <a:p>
             <a:fld id="{3BF34D9E-550C-6C44-8CC8-074FD14C08B4}" type="datetimeFigureOut">
               <a:rPr lang="en-US" smtClean="0"/>
-              <a:t>7/5/26</a:t>
+              <a:t>7/6/26</a:t>
             </a:fld>
             <a:endParaRPr lang="en-US"/>
           </a:p>
@@ -1398,7 +1403,7 @@
           <a:p>
             <a:fld id="{3BF34D9E-550C-6C44-8CC8-074FD14C08B4}" type="datetimeFigureOut">
               <a:rPr lang="en-US" smtClean="0"/>
-              <a:t>7/5/26</a:t>
+              <a:t>7/6/26</a:t>
             </a:fld>
             <a:endParaRPr lang="en-US"/>
           </a:p>
@@ -1810,7 +1815,7 @@
           <a:p>
             <a:fld id="{3BF34D9E-550C-6C44-8CC8-074FD14C08B4}" type="datetimeFigureOut">
               <a:rPr lang="en-US" smtClean="0"/>
-              <a:t>7/5/26</a:t>
+              <a:t>7/6/26</a:t>
             </a:fld>
             <a:endParaRPr lang="en-US"/>
           </a:p>
@@ -1951,7 +1956,7 @@
           <a:p>
             <a:fld id="{3BF34D9E-550C-6C44-8CC8-074FD14C08B4}" type="datetimeFigureOut">
               <a:rPr lang="en-US" smtClean="0"/>
-              <a:t>7/5/26</a:t>
+              <a:t>7/6/26</a:t>
             </a:fld>
             <a:endParaRPr lang="en-US"/>
           </a:p>
@@ -2064,7 +2069,7 @@
           <a:p>
             <a:fld id="{3BF34D9E-550C-6C44-8CC8-074FD14C08B4}" type="datetimeFigureOut">
               <a:rPr lang="en-US" smtClean="0"/>
-              <a:t>7/5/26</a:t>
+              <a:t>7/6/26</a:t>
             </a:fld>
             <a:endParaRPr lang="en-US"/>
           </a:p>
@@ -2375,7 +2380,7 @@
           <a:p>
             <a:fld id="{3BF34D9E-550C-6C44-8CC8-074FD14C08B4}" type="datetimeFigureOut">
               <a:rPr lang="en-US" smtClean="0"/>
-              <a:t>7/5/26</a:t>
+              <a:t>7/6/26</a:t>
             </a:fld>
             <a:endParaRPr lang="en-US"/>
           </a:p>
@@ -2663,7 +2668,7 @@
           <a:p>
             <a:fld id="{3BF34D9E-550C-6C44-8CC8-074FD14C08B4}" type="datetimeFigureOut">
               <a:rPr lang="en-US" smtClean="0"/>
-              <a:t>7/5/26</a:t>
+              <a:t>7/6/26</a:t>
             </a:fld>
             <a:endParaRPr lang="en-US"/>
           </a:p>
@@ -2904,7 +2909,7 @@
           <a:p>
             <a:fld id="{3BF34D9E-550C-6C44-8CC8-074FD14C08B4}" type="datetimeFigureOut">
               <a:rPr lang="en-US" smtClean="0"/>
-              <a:t>7/5/26</a:t>
+              <a:t>7/6/26</a:t>
             </a:fld>
             <a:endParaRPr lang="en-US"/>
           </a:p>
@@ -3420,6 +3425,14 @@
             </a:r>
             <a:r>
               <a:rPr lang="en-US" sz="1400" dirty="0" err="1"/>
+              <a:t>Weiqing</a:t>
+            </a:r>
+            <a:r>
+              <a:rPr lang="en-US" sz="1400" dirty="0"/>
+              <a:t> Chen/</a:t>
+            </a:r>
+            <a:r>
+              <a:rPr lang="en-US" sz="1400" dirty="0" err="1"/>
               <a:t>Guangyu</a:t>
             </a:r>
             <a:r>
@@ -3430,7 +3443,7 @@
           <a:p>
             <a:r>
               <a:rPr lang="en-US" sz="1400" dirty="0"/>
-              <a:t>12:00-13:00	Part 5: Application #2: Single cell analysis with efficient finetune single cell foundation models, and use it for acquisition, model training, and interpretation (hands-on exercises). (Fei He)</a:t>
+              <a:t>12:00-13:00	Part 5: Application #2: Single cell analysis with efficient finetune single cell foundation models, and use it for acquisition, model training, and interpretation (hands-on exercises). (Fei He/Dong Xu’s group)</a:t>
             </a:r>
           </a:p>
           <a:p>
@@ -3448,13 +3461,13 @@
           <a:p>
             <a:r>
               <a:rPr lang="en-US" sz="1400" dirty="0"/>
-              <a:t>14:30-15:00	Part 7: Applications #3: Function-related cellular neighborhood analysis with data acquisition, model training, and interpretation (hands-on exercises). (Yang Yu)</a:t>
+              <a:t>14:30-15:00	Part 7: Applications #3: Function-related cellular neighborhood analysis with data acquisition, model training, and interpretation (hands-on exercises). (Yang Yu/Dong Xu’s group)</a:t>
             </a:r>
           </a:p>
           <a:p>
             <a:r>
               <a:rPr lang="en-US" sz="1400" dirty="0"/>
-              <a:t>15:00-15:30	Part 8: Applications #4: Functional tissue unit analysis with data acquisition, model training, and interpretation (hands-on exercises). (Yuzhou Chang)</a:t>
+              <a:t>15:00-15:30	Part 8: Applications #4: Functional tissue unit analysis with data acquisition, model training, and interpretation (hands-on exercises). (Yuzhou Chang/Qin Ma’s group)</a:t>
             </a:r>
           </a:p>
           <a:p>
@@ -3468,7 +3481,7 @@
             </a:r>
             <a:r>
               <a:rPr lang="en-US" sz="1400" dirty="0"/>
-              <a:t> Raina)</a:t>
+              <a:t> Raina/Juexin Wang’s group)</a:t>
             </a:r>
           </a:p>
           <a:p>
